--- a/10-Knowledge-Products/KP1-GEA/videos/module_1/en/decks/KP1_M1_Deck_v0.1.pptx
+++ b/10-Knowledge-Products/KP1-GEA/videos/module_1/en/decks/KP1_M1_Deck_v0.1.pptx
@@ -3657,7 +3657,7 @@
           <a:lstStyle/>
           <a:p>
             <a:r>
-              <a:t>VO: Phase five. Execute and Govern. The question: how do we sustain this? The approved roadmap becomes a project pipeline. The small permanent EA team — two to four senior architects — turns the EA from a one-time delivery into a living repository. The EA Board reviews new projects against the architecture, approves cross-ministry decisions, enforces boundaries between domains. Quarterly reviews. Indefinitely.</a:t>
+              <a:t>VO: Notice the rhythm. Four sign-offs in six months. Your minister does not review every diagram. They review at four moments, each tied to a defined deliverable. Between sign-offs, the architects work. The minister's job in between is to remove obstacles — the political ones, mostly. The technical ones are why the architects were hired.</a:t>
             </a:r>
           </a:p>
         </p:txBody>
@@ -3727,7 +3727,7 @@
           <a:lstStyle/>
           <a:p>
             <a:r>
-              <a:t>VO: Notice the rhythm. Four sign-offs in six months. Your minister does not review every diagram. They review at four moments, each tied to a defined deliverable. Between sign-offs, the architects work. The minister's job in between is to remove obstacles — the political ones, mostly. The technical ones are why the architects were hired.</a:t>
+              <a:t>VO: Phase five. Execute and Govern. The question: how do we sustain this? The approved roadmap becomes a project pipeline. The small permanent EA team — two to four senior architects — turns the EA from a one-time delivery into a living repository. The EA Board reviews new projects against the architecture, approves cross-ministry decisions, enforces boundaries between domains. Quarterly reviews. Indefinitely.</a:t>
             </a:r>
           </a:p>
         </p:txBody>
@@ -31062,29 +31062,27 @@
                 </a:solidFill>
                 <a:latin typeface="Arial"/>
               </a:rPr>
-              <a:t>Phase 5 — Execute &amp; Govern</a:t>
-            </a:r>
-          </a:p>
-        </p:txBody>
-      </p:sp>
-      <p:sp>
-        <p:nvSpPr>
-          <p:cNvPr id="4" name="Rounded Rectangle 3"/>
+              <a:t>Your minister reviews four times — not every diagram</a:t>
+            </a:r>
+          </a:p>
+        </p:txBody>
+      </p:sp>
+      <p:sp>
+        <p:nvSpPr>
+          <p:cNvPr id="4" name="Rectangle 3"/>
           <p:cNvSpPr/>
           <p:nvPr/>
         </p:nvSpPr>
         <p:spPr>
           <a:xfrm>
-            <a:off x="7360920" y="384048"/>
-            <a:ext cx="841248" cy="310896"/>
-          </a:xfrm>
-          <a:prstGeom prst="roundRect">
-            <a:avLst>
-              <a:gd name="adj" fmla="val 35000"/>
-            </a:avLst>
+            <a:off x="822960" y="2514600"/>
+            <a:ext cx="10515600" cy="31750"/>
+          </a:xfrm>
+          <a:prstGeom prst="rect">
+            <a:avLst/>
           </a:prstGeom>
           <a:solidFill>
-            <a:srgbClr val="E5F5FB"/>
+            <a:srgbClr val="BFBFBF"/>
           </a:solidFill>
           <a:ln>
             <a:noFill/>
@@ -31115,22 +31113,20 @@
       </p:sp>
       <p:sp>
         <p:nvSpPr>
-          <p:cNvPr id="5" name="Rounded Rectangle 4"/>
+          <p:cNvPr id="5" name="Diamond 4"/>
           <p:cNvSpPr/>
           <p:nvPr/>
         </p:nvSpPr>
         <p:spPr>
           <a:xfrm>
-            <a:off x="8257032" y="384048"/>
-            <a:ext cx="841248" cy="310896"/>
-          </a:xfrm>
-          <a:prstGeom prst="roundRect">
-            <a:avLst>
-              <a:gd name="adj" fmla="val 35000"/>
-            </a:avLst>
+            <a:off x="1371600" y="2395728"/>
+            <a:ext cx="256032" cy="256032"/>
+          </a:xfrm>
+          <a:prstGeom prst="diamond">
+            <a:avLst/>
           </a:prstGeom>
           <a:solidFill>
-            <a:srgbClr val="E5F5FB"/>
+            <a:srgbClr val="006E96"/>
           </a:solidFill>
           <a:ln>
             <a:noFill/>
@@ -31161,22 +31157,75 @@
       </p:sp>
       <p:sp>
         <p:nvSpPr>
-          <p:cNvPr id="6" name="Rounded Rectangle 5"/>
+          <p:cNvPr id="6" name="TextBox 5"/>
+          <p:cNvSpPr txBox="1"/>
+          <p:nvPr/>
+        </p:nvSpPr>
+        <p:spPr>
+          <a:xfrm>
+            <a:off x="320040" y="2880360"/>
+            <a:ext cx="2377440" cy="1188720"/>
+          </a:xfrm>
+          <a:prstGeom prst="rect">
+            <a:avLst/>
+          </a:prstGeom>
+          <a:noFill/>
+        </p:spPr>
+        <p:txBody>
+          <a:bodyPr wrap="square">
+            <a:spAutoFit/>
+          </a:bodyPr>
+          <a:lstStyle/>
+          <a:p>
+            <a:pPr algn="ctr">
+              <a:spcAft>
+                <a:spcPts val="300"/>
+              </a:spcAft>
+            </a:pPr>
+            <a:r>
+              <a:rPr sz="1400" b="1" i="0">
+                <a:solidFill>
+                  <a:srgbClr val="1A1A1A"/>
+                </a:solidFill>
+                <a:latin typeface="Arial"/>
+              </a:rPr>
+              <a:t>The picture is accurate</a:t>
+            </a:r>
+          </a:p>
+          <a:p>
+            <a:pPr algn="ctr">
+              <a:spcAft>
+                <a:spcPts val="300"/>
+              </a:spcAft>
+            </a:pPr>
+            <a:r>
+              <a:rPr sz="1200" b="0" i="0">
+                <a:solidFill>
+                  <a:srgbClr val="595959"/>
+                </a:solidFill>
+                <a:latin typeface="Arial"/>
+              </a:rPr>
+              <a:t>end of Discover</a:t>
+            </a:r>
+          </a:p>
+        </p:txBody>
+      </p:sp>
+      <p:sp>
+        <p:nvSpPr>
+          <p:cNvPr id="7" name="Diamond 6"/>
           <p:cNvSpPr/>
           <p:nvPr/>
         </p:nvSpPr>
         <p:spPr>
           <a:xfrm>
-            <a:off x="9153144" y="384048"/>
-            <a:ext cx="841248" cy="310896"/>
-          </a:xfrm>
-          <a:prstGeom prst="roundRect">
-            <a:avLst>
-              <a:gd name="adj" fmla="val 35000"/>
-            </a:avLst>
+            <a:off x="4069080" y="2395728"/>
+            <a:ext cx="256032" cy="256032"/>
+          </a:xfrm>
+          <a:prstGeom prst="diamond">
+            <a:avLst/>
           </a:prstGeom>
           <a:solidFill>
-            <a:srgbClr val="E5F5FB"/>
+            <a:srgbClr val="006E96"/>
           </a:solidFill>
           <a:ln>
             <a:noFill/>
@@ -31207,22 +31256,75 @@
       </p:sp>
       <p:sp>
         <p:nvSpPr>
-          <p:cNvPr id="7" name="Rounded Rectangle 6"/>
+          <p:cNvPr id="8" name="TextBox 7"/>
+          <p:cNvSpPr txBox="1"/>
+          <p:nvPr/>
+        </p:nvSpPr>
+        <p:spPr>
+          <a:xfrm>
+            <a:off x="3017520" y="2880360"/>
+            <a:ext cx="2377440" cy="1188720"/>
+          </a:xfrm>
+          <a:prstGeom prst="rect">
+            <a:avLst/>
+          </a:prstGeom>
+          <a:noFill/>
+        </p:spPr>
+        <p:txBody>
+          <a:bodyPr wrap="square">
+            <a:spAutoFit/>
+          </a:bodyPr>
+          <a:lstStyle/>
+          <a:p>
+            <a:pPr algn="ctr">
+              <a:spcAft>
+                <a:spcPts val="300"/>
+              </a:spcAft>
+            </a:pPr>
+            <a:r>
+              <a:rPr sz="1400" b="1" i="0">
+                <a:solidFill>
+                  <a:srgbClr val="1A1A1A"/>
+                </a:solidFill>
+                <a:latin typeface="Arial"/>
+              </a:rPr>
+              <a:t>The gap reflects ground truth</a:t>
+            </a:r>
+          </a:p>
+          <a:p>
+            <a:pPr algn="ctr">
+              <a:spcAft>
+                <a:spcPts val="300"/>
+              </a:spcAft>
+            </a:pPr>
+            <a:r>
+              <a:rPr sz="1200" b="0" i="0">
+                <a:solidFill>
+                  <a:srgbClr val="595959"/>
+                </a:solidFill>
+                <a:latin typeface="Arial"/>
+              </a:rPr>
+              <a:t>end of Assess</a:t>
+            </a:r>
+          </a:p>
+        </p:txBody>
+      </p:sp>
+      <p:sp>
+        <p:nvSpPr>
+          <p:cNvPr id="9" name="Diamond 8"/>
           <p:cNvSpPr/>
           <p:nvPr/>
         </p:nvSpPr>
         <p:spPr>
           <a:xfrm>
-            <a:off x="10049256" y="384048"/>
-            <a:ext cx="841248" cy="310896"/>
-          </a:xfrm>
-          <a:prstGeom prst="roundRect">
-            <a:avLst>
-              <a:gd name="adj" fmla="val 35000"/>
-            </a:avLst>
+            <a:off x="6766560" y="2395728"/>
+            <a:ext cx="256032" cy="256032"/>
+          </a:xfrm>
+          <a:prstGeom prst="diamond">
+            <a:avLst/>
           </a:prstGeom>
           <a:solidFill>
-            <a:srgbClr val="E5F5FB"/>
+            <a:srgbClr val="006E96"/>
           </a:solidFill>
           <a:ln>
             <a:noFill/>
@@ -31253,22 +31355,75 @@
       </p:sp>
       <p:sp>
         <p:nvSpPr>
-          <p:cNvPr id="8" name="Rounded Rectangle 7"/>
+          <p:cNvPr id="10" name="TextBox 9"/>
+          <p:cNvSpPr txBox="1"/>
+          <p:nvPr/>
+        </p:nvSpPr>
+        <p:spPr>
+          <a:xfrm>
+            <a:off x="5715000" y="2880360"/>
+            <a:ext cx="2377440" cy="1188720"/>
+          </a:xfrm>
+          <a:prstGeom prst="rect">
+            <a:avLst/>
+          </a:prstGeom>
+          <a:noFill/>
+        </p:spPr>
+        <p:txBody>
+          <a:bodyPr wrap="square">
+            <a:spAutoFit/>
+          </a:bodyPr>
+          <a:lstStyle/>
+          <a:p>
+            <a:pPr algn="ctr">
+              <a:spcAft>
+                <a:spcPts val="300"/>
+              </a:spcAft>
+            </a:pPr>
+            <a:r>
+              <a:rPr sz="1400" b="1" i="0">
+                <a:solidFill>
+                  <a:srgbClr val="1A1A1A"/>
+                </a:solidFill>
+                <a:latin typeface="Arial"/>
+              </a:rPr>
+              <a:t>Framework + sourcing approach</a:t>
+            </a:r>
+          </a:p>
+          <a:p>
+            <a:pPr algn="ctr">
+              <a:spcAft>
+                <a:spcPts val="300"/>
+              </a:spcAft>
+            </a:pPr>
+            <a:r>
+              <a:rPr sz="1200" b="0" i="0">
+                <a:solidFill>
+                  <a:srgbClr val="595959"/>
+                </a:solidFill>
+                <a:latin typeface="Arial"/>
+              </a:rPr>
+              <a:t>end of Adapt</a:t>
+            </a:r>
+          </a:p>
+        </p:txBody>
+      </p:sp>
+      <p:sp>
+        <p:nvSpPr>
+          <p:cNvPr id="11" name="Diamond 10"/>
           <p:cNvSpPr/>
           <p:nvPr/>
         </p:nvSpPr>
         <p:spPr>
           <a:xfrm>
-            <a:off x="10945368" y="384048"/>
-            <a:ext cx="841248" cy="310896"/>
-          </a:xfrm>
-          <a:prstGeom prst="roundRect">
-            <a:avLst>
-              <a:gd name="adj" fmla="val 35000"/>
-            </a:avLst>
+            <a:off x="9464040" y="2395728"/>
+            <a:ext cx="256032" cy="256032"/>
+          </a:xfrm>
+          <a:prstGeom prst="diamond">
+            <a:avLst/>
           </a:prstGeom>
           <a:solidFill>
-            <a:srgbClr val="009CD6"/>
+            <a:srgbClr val="006E96"/>
           </a:solidFill>
           <a:ln>
             <a:noFill/>
@@ -31299,14 +31454,14 @@
       </p:sp>
       <p:sp>
         <p:nvSpPr>
-          <p:cNvPr id="9" name="TextBox 8"/>
+          <p:cNvPr id="12" name="TextBox 11"/>
           <p:cNvSpPr txBox="1"/>
           <p:nvPr/>
         </p:nvSpPr>
         <p:spPr>
           <a:xfrm>
-            <a:off x="658368" y="1508760"/>
-            <a:ext cx="2103120" cy="548640"/>
+            <a:off x="8412480" y="2880360"/>
+            <a:ext cx="2377440" cy="1188720"/>
           </a:xfrm>
           <a:prstGeom prst="rect">
             <a:avLst/>
@@ -31319,28 +31474,49 @@
           </a:bodyPr>
           <a:lstStyle/>
           <a:p>
-            <a:r>
-              <a:rPr sz="1300" b="1" i="0">
-                <a:solidFill>
-                  <a:srgbClr val="006E96"/>
-                </a:solidFill>
-                <a:latin typeface="Arial"/>
-              </a:rPr>
-              <a:t>QUESTION</a:t>
-            </a:r>
-          </a:p>
-        </p:txBody>
-      </p:sp>
-      <p:sp>
-        <p:nvSpPr>
-          <p:cNvPr id="10" name="TextBox 9"/>
+            <a:pPr algn="ctr">
+              <a:spcAft>
+                <a:spcPts val="300"/>
+              </a:spcAft>
+            </a:pPr>
+            <a:r>
+              <a:rPr sz="1400" b="1" i="0">
+                <a:solidFill>
+                  <a:srgbClr val="1A1A1A"/>
+                </a:solidFill>
+                <a:latin typeface="Arial"/>
+              </a:rPr>
+              <a:t>Roadmap approved, budget committed</a:t>
+            </a:r>
+          </a:p>
+          <a:p>
+            <a:pPr algn="ctr">
+              <a:spcAft>
+                <a:spcPts val="300"/>
+              </a:spcAft>
+            </a:pPr>
+            <a:r>
+              <a:rPr sz="1200" b="0" i="0">
+                <a:solidFill>
+                  <a:srgbClr val="595959"/>
+                </a:solidFill>
+                <a:latin typeface="Arial"/>
+              </a:rPr>
+              <a:t>end of Plan</a:t>
+            </a:r>
+          </a:p>
+        </p:txBody>
+      </p:sp>
+      <p:sp>
+        <p:nvSpPr>
+          <p:cNvPr id="13" name="TextBox 12"/>
           <p:cNvSpPr txBox="1"/>
           <p:nvPr/>
         </p:nvSpPr>
         <p:spPr>
           <a:xfrm>
-            <a:off x="2834640" y="1490472"/>
-            <a:ext cx="8595360" cy="914400"/>
+            <a:off x="822960" y="4480560"/>
+            <a:ext cx="10515600" cy="1463040"/>
           </a:xfrm>
           <a:prstGeom prst="rect">
             <a:avLst/>
@@ -31353,6 +31529,11 @@
           </a:bodyPr>
           <a:lstStyle/>
           <a:p>
+            <a:pPr>
+              <a:spcAft>
+                <a:spcPts val="800"/>
+              </a:spcAft>
+            </a:pPr>
             <a:r>
               <a:rPr sz="1800" b="0" i="0">
                 <a:solidFill>
@@ -31360,109 +31541,23 @@
                 </a:solidFill>
                 <a:latin typeface="Arial"/>
               </a:rPr>
-              <a:t>How do we sustain this?</a:t>
-            </a:r>
-          </a:p>
-        </p:txBody>
-      </p:sp>
-      <p:sp>
-        <p:nvSpPr>
-          <p:cNvPr id="11" name="TextBox 10"/>
-          <p:cNvSpPr txBox="1"/>
-          <p:nvPr/>
-        </p:nvSpPr>
-        <p:spPr>
-          <a:xfrm>
-            <a:off x="658368" y="2587752"/>
-            <a:ext cx="2103120" cy="548640"/>
-          </a:xfrm>
-          <a:prstGeom prst="rect">
-            <a:avLst/>
-          </a:prstGeom>
-          <a:noFill/>
-        </p:spPr>
-        <p:txBody>
-          <a:bodyPr wrap="square">
-            <a:spAutoFit/>
-          </a:bodyPr>
-          <a:lstStyle/>
-          <a:p>
-            <a:r>
-              <a:rPr sz="1300" b="1" i="0">
-                <a:solidFill>
-                  <a:srgbClr val="006E96"/>
-                </a:solidFill>
-                <a:latin typeface="Arial"/>
-              </a:rPr>
-              <a:t>DELIVERABLE</a:t>
-            </a:r>
-          </a:p>
-        </p:txBody>
-      </p:sp>
-      <p:sp>
-        <p:nvSpPr>
-          <p:cNvPr id="12" name="TextBox 11"/>
-          <p:cNvSpPr txBox="1"/>
-          <p:nvPr/>
-        </p:nvSpPr>
-        <p:spPr>
-          <a:xfrm>
-            <a:off x="2834640" y="2569464"/>
-            <a:ext cx="8595360" cy="1417320"/>
-          </a:xfrm>
-          <a:prstGeom prst="rect">
-            <a:avLst/>
-          </a:prstGeom>
-          <a:noFill/>
-        </p:spPr>
-        <p:txBody>
-          <a:bodyPr wrap="square">
-            <a:spAutoFit/>
-          </a:bodyPr>
-          <a:lstStyle/>
-          <a:p>
-            <a:r>
-              <a:rPr sz="1800" b="1" i="0">
-                <a:solidFill>
-                  <a:srgbClr val="1A1A1A"/>
-                </a:solidFill>
-                <a:latin typeface="Arial"/>
-              </a:rPr>
-              <a:t>A living, governed EA — repository plus practice. The 2–4 permanent architects keep it alive; the EA Board reviews projects against it.</a:t>
-            </a:r>
-          </a:p>
-        </p:txBody>
-      </p:sp>
-      <p:sp>
-        <p:nvSpPr>
-          <p:cNvPr id="13" name="TextBox 12"/>
-          <p:cNvSpPr txBox="1"/>
-          <p:nvPr/>
-        </p:nvSpPr>
-        <p:spPr>
-          <a:xfrm>
-            <a:off x="658368" y="4169664"/>
-            <a:ext cx="2103120" cy="548640"/>
-          </a:xfrm>
-          <a:prstGeom prst="rect">
-            <a:avLst/>
-          </a:prstGeom>
-          <a:noFill/>
-        </p:spPr>
-        <p:txBody>
-          <a:bodyPr wrap="square">
-            <a:spAutoFit/>
-          </a:bodyPr>
-          <a:lstStyle/>
-          <a:p>
-            <a:r>
-              <a:rPr sz="1300" b="1" i="0">
-                <a:solidFill>
-                  <a:srgbClr val="006E96"/>
-                </a:solidFill>
-                <a:latin typeface="Arial"/>
-              </a:rPr>
-              <a:t>CADENCE</a:t>
+              <a:t>Between sign-offs, the architects work.</a:t>
+            </a:r>
+          </a:p>
+          <a:p>
+            <a:pPr>
+              <a:spcAft>
+                <a:spcPts val="800"/>
+              </a:spcAft>
+            </a:pPr>
+            <a:r>
+              <a:rPr sz="1800" b="0" i="0">
+                <a:solidFill>
+                  <a:srgbClr val="595959"/>
+                </a:solidFill>
+                <a:latin typeface="Arial"/>
+              </a:rPr>
+              <a:t>The minister’s job in between is to remove obstacles — the political ones, mostly. The technical ones are why the architects were hired.</a:t>
             </a:r>
           </a:p>
         </p:txBody>
@@ -31470,108 +31565,6 @@
       <p:sp>
         <p:nvSpPr>
           <p:cNvPr id="14" name="TextBox 13"/>
-          <p:cNvSpPr txBox="1"/>
-          <p:nvPr/>
-        </p:nvSpPr>
-        <p:spPr>
-          <a:xfrm>
-            <a:off x="2834640" y="4151376"/>
-            <a:ext cx="8595360" cy="1325880"/>
-          </a:xfrm>
-          <a:prstGeom prst="rect">
-            <a:avLst/>
-          </a:prstGeom>
-          <a:noFill/>
-        </p:spPr>
-        <p:txBody>
-          <a:bodyPr wrap="square">
-            <a:spAutoFit/>
-          </a:bodyPr>
-          <a:lstStyle/>
-          <a:p>
-            <a:r>
-              <a:rPr sz="1800" b="1" i="0">
-                <a:solidFill>
-                  <a:srgbClr val="1A1A1A"/>
-                </a:solidFill>
-                <a:latin typeface="Arial"/>
-              </a:rPr>
-              <a:t>Quarterly Board reviews — indefinitely. New projects reviewed against the architecture; cross-ministry decisions approved; domain boundaries enforced.</a:t>
-            </a:r>
-          </a:p>
-        </p:txBody>
-      </p:sp>
-      <p:sp>
-        <p:nvSpPr>
-          <p:cNvPr id="15" name="TextBox 14"/>
-          <p:cNvSpPr txBox="1"/>
-          <p:nvPr/>
-        </p:nvSpPr>
-        <p:spPr>
-          <a:xfrm>
-            <a:off x="658368" y="5660136"/>
-            <a:ext cx="2103120" cy="548640"/>
-          </a:xfrm>
-          <a:prstGeom prst="rect">
-            <a:avLst/>
-          </a:prstGeom>
-          <a:noFill/>
-        </p:spPr>
-        <p:txBody>
-          <a:bodyPr wrap="square">
-            <a:spAutoFit/>
-          </a:bodyPr>
-          <a:lstStyle/>
-          <a:p>
-            <a:r>
-              <a:rPr sz="1300" b="1" i="0">
-                <a:solidFill>
-                  <a:srgbClr val="006E96"/>
-                </a:solidFill>
-                <a:latin typeface="Arial"/>
-              </a:rPr>
-              <a:t>DURATION</a:t>
-            </a:r>
-          </a:p>
-        </p:txBody>
-      </p:sp>
-      <p:sp>
-        <p:nvSpPr>
-          <p:cNvPr id="16" name="TextBox 15"/>
-          <p:cNvSpPr txBox="1"/>
-          <p:nvPr/>
-        </p:nvSpPr>
-        <p:spPr>
-          <a:xfrm>
-            <a:off x="2834640" y="5641848"/>
-            <a:ext cx="8595360" cy="777240"/>
-          </a:xfrm>
-          <a:prstGeom prst="rect">
-            <a:avLst/>
-          </a:prstGeom>
-          <a:noFill/>
-        </p:spPr>
-        <p:txBody>
-          <a:bodyPr wrap="square">
-            <a:spAutoFit/>
-          </a:bodyPr>
-          <a:lstStyle/>
-          <a:p>
-            <a:r>
-              <a:rPr sz="1800" b="0" i="0">
-                <a:solidFill>
-                  <a:srgbClr val="1A1A1A"/>
-                </a:solidFill>
-                <a:latin typeface="Arial"/>
-              </a:rPr>
-              <a:t>Ongoing — your country’s permanent way of working</a:t>
-            </a:r>
-          </a:p>
-        </p:txBody>
-      </p:sp>
-      <p:sp>
-        <p:nvSpPr>
-          <p:cNvPr id="17" name="TextBox 16"/>
           <p:cNvSpPr txBox="1"/>
           <p:nvPr/>
         </p:nvSpPr>
@@ -31694,27 +31687,29 @@
                 </a:solidFill>
                 <a:latin typeface="Arial"/>
               </a:rPr>
-              <a:t>Your minister reviews four times — not every diagram</a:t>
-            </a:r>
-          </a:p>
-        </p:txBody>
-      </p:sp>
-      <p:sp>
-        <p:nvSpPr>
-          <p:cNvPr id="4" name="Rectangle 3"/>
+              <a:t>Phase 5 — Execute &amp; Govern</a:t>
+            </a:r>
+          </a:p>
+        </p:txBody>
+      </p:sp>
+      <p:sp>
+        <p:nvSpPr>
+          <p:cNvPr id="4" name="Rounded Rectangle 3"/>
           <p:cNvSpPr/>
           <p:nvPr/>
         </p:nvSpPr>
         <p:spPr>
           <a:xfrm>
-            <a:off x="822960" y="2514600"/>
-            <a:ext cx="10515600" cy="31750"/>
-          </a:xfrm>
-          <a:prstGeom prst="rect">
-            <a:avLst/>
+            <a:off x="7360920" y="384048"/>
+            <a:ext cx="841248" cy="310896"/>
+          </a:xfrm>
+          <a:prstGeom prst="roundRect">
+            <a:avLst>
+              <a:gd name="adj" fmla="val 35000"/>
+            </a:avLst>
           </a:prstGeom>
           <a:solidFill>
-            <a:srgbClr val="BFBFBF"/>
+            <a:srgbClr val="E5F5FB"/>
           </a:solidFill>
           <a:ln>
             <a:noFill/>
@@ -31745,20 +31740,22 @@
       </p:sp>
       <p:sp>
         <p:nvSpPr>
-          <p:cNvPr id="5" name="Diamond 4"/>
+          <p:cNvPr id="5" name="Rounded Rectangle 4"/>
           <p:cNvSpPr/>
           <p:nvPr/>
         </p:nvSpPr>
         <p:spPr>
           <a:xfrm>
-            <a:off x="1371600" y="2395728"/>
-            <a:ext cx="256032" cy="256032"/>
-          </a:xfrm>
-          <a:prstGeom prst="diamond">
-            <a:avLst/>
+            <a:off x="8257032" y="384048"/>
+            <a:ext cx="841248" cy="310896"/>
+          </a:xfrm>
+          <a:prstGeom prst="roundRect">
+            <a:avLst>
+              <a:gd name="adj" fmla="val 35000"/>
+            </a:avLst>
           </a:prstGeom>
           <a:solidFill>
-            <a:srgbClr val="006E96"/>
+            <a:srgbClr val="E5F5FB"/>
           </a:solidFill>
           <a:ln>
             <a:noFill/>
@@ -31789,75 +31786,22 @@
       </p:sp>
       <p:sp>
         <p:nvSpPr>
-          <p:cNvPr id="6" name="TextBox 5"/>
-          <p:cNvSpPr txBox="1"/>
-          <p:nvPr/>
-        </p:nvSpPr>
-        <p:spPr>
-          <a:xfrm>
-            <a:off x="320040" y="2880360"/>
-            <a:ext cx="2377440" cy="1188720"/>
-          </a:xfrm>
-          <a:prstGeom prst="rect">
-            <a:avLst/>
-          </a:prstGeom>
-          <a:noFill/>
-        </p:spPr>
-        <p:txBody>
-          <a:bodyPr wrap="square">
-            <a:spAutoFit/>
-          </a:bodyPr>
-          <a:lstStyle/>
-          <a:p>
-            <a:pPr algn="ctr">
-              <a:spcAft>
-                <a:spcPts val="300"/>
-              </a:spcAft>
-            </a:pPr>
-            <a:r>
-              <a:rPr sz="1400" b="1" i="0">
-                <a:solidFill>
-                  <a:srgbClr val="1A1A1A"/>
-                </a:solidFill>
-                <a:latin typeface="Arial"/>
-              </a:rPr>
-              <a:t>The picture is accurate</a:t>
-            </a:r>
-          </a:p>
-          <a:p>
-            <a:pPr algn="ctr">
-              <a:spcAft>
-                <a:spcPts val="300"/>
-              </a:spcAft>
-            </a:pPr>
-            <a:r>
-              <a:rPr sz="1200" b="0" i="0">
-                <a:solidFill>
-                  <a:srgbClr val="595959"/>
-                </a:solidFill>
-                <a:latin typeface="Arial"/>
-              </a:rPr>
-              <a:t>end of Discover</a:t>
-            </a:r>
-          </a:p>
-        </p:txBody>
-      </p:sp>
-      <p:sp>
-        <p:nvSpPr>
-          <p:cNvPr id="7" name="Diamond 6"/>
+          <p:cNvPr id="6" name="Rounded Rectangle 5"/>
           <p:cNvSpPr/>
           <p:nvPr/>
         </p:nvSpPr>
         <p:spPr>
           <a:xfrm>
-            <a:off x="4069080" y="2395728"/>
-            <a:ext cx="256032" cy="256032"/>
-          </a:xfrm>
-          <a:prstGeom prst="diamond">
-            <a:avLst/>
+            <a:off x="9153144" y="384048"/>
+            <a:ext cx="841248" cy="310896"/>
+          </a:xfrm>
+          <a:prstGeom prst="roundRect">
+            <a:avLst>
+              <a:gd name="adj" fmla="val 35000"/>
+            </a:avLst>
           </a:prstGeom>
           <a:solidFill>
-            <a:srgbClr val="006E96"/>
+            <a:srgbClr val="E5F5FB"/>
           </a:solidFill>
           <a:ln>
             <a:noFill/>
@@ -31888,75 +31832,22 @@
       </p:sp>
       <p:sp>
         <p:nvSpPr>
-          <p:cNvPr id="8" name="TextBox 7"/>
-          <p:cNvSpPr txBox="1"/>
-          <p:nvPr/>
-        </p:nvSpPr>
-        <p:spPr>
-          <a:xfrm>
-            <a:off x="3017520" y="2880360"/>
-            <a:ext cx="2377440" cy="1188720"/>
-          </a:xfrm>
-          <a:prstGeom prst="rect">
-            <a:avLst/>
-          </a:prstGeom>
-          <a:noFill/>
-        </p:spPr>
-        <p:txBody>
-          <a:bodyPr wrap="square">
-            <a:spAutoFit/>
-          </a:bodyPr>
-          <a:lstStyle/>
-          <a:p>
-            <a:pPr algn="ctr">
-              <a:spcAft>
-                <a:spcPts val="300"/>
-              </a:spcAft>
-            </a:pPr>
-            <a:r>
-              <a:rPr sz="1400" b="1" i="0">
-                <a:solidFill>
-                  <a:srgbClr val="1A1A1A"/>
-                </a:solidFill>
-                <a:latin typeface="Arial"/>
-              </a:rPr>
-              <a:t>The gap reflects ground truth</a:t>
-            </a:r>
-          </a:p>
-          <a:p>
-            <a:pPr algn="ctr">
-              <a:spcAft>
-                <a:spcPts val="300"/>
-              </a:spcAft>
-            </a:pPr>
-            <a:r>
-              <a:rPr sz="1200" b="0" i="0">
-                <a:solidFill>
-                  <a:srgbClr val="595959"/>
-                </a:solidFill>
-                <a:latin typeface="Arial"/>
-              </a:rPr>
-              <a:t>end of Assess</a:t>
-            </a:r>
-          </a:p>
-        </p:txBody>
-      </p:sp>
-      <p:sp>
-        <p:nvSpPr>
-          <p:cNvPr id="9" name="Diamond 8"/>
+          <p:cNvPr id="7" name="Rounded Rectangle 6"/>
           <p:cNvSpPr/>
           <p:nvPr/>
         </p:nvSpPr>
         <p:spPr>
           <a:xfrm>
-            <a:off x="6766560" y="2395728"/>
-            <a:ext cx="256032" cy="256032"/>
-          </a:xfrm>
-          <a:prstGeom prst="diamond">
-            <a:avLst/>
+            <a:off x="10049256" y="384048"/>
+            <a:ext cx="841248" cy="310896"/>
+          </a:xfrm>
+          <a:prstGeom prst="roundRect">
+            <a:avLst>
+              <a:gd name="adj" fmla="val 35000"/>
+            </a:avLst>
           </a:prstGeom>
           <a:solidFill>
-            <a:srgbClr val="006E96"/>
+            <a:srgbClr val="E5F5FB"/>
           </a:solidFill>
           <a:ln>
             <a:noFill/>
@@ -31987,75 +31878,22 @@
       </p:sp>
       <p:sp>
         <p:nvSpPr>
-          <p:cNvPr id="10" name="TextBox 9"/>
-          <p:cNvSpPr txBox="1"/>
-          <p:nvPr/>
-        </p:nvSpPr>
-        <p:spPr>
-          <a:xfrm>
-            <a:off x="5715000" y="2880360"/>
-            <a:ext cx="2377440" cy="1188720"/>
-          </a:xfrm>
-          <a:prstGeom prst="rect">
-            <a:avLst/>
-          </a:prstGeom>
-          <a:noFill/>
-        </p:spPr>
-        <p:txBody>
-          <a:bodyPr wrap="square">
-            <a:spAutoFit/>
-          </a:bodyPr>
-          <a:lstStyle/>
-          <a:p>
-            <a:pPr algn="ctr">
-              <a:spcAft>
-                <a:spcPts val="300"/>
-              </a:spcAft>
-            </a:pPr>
-            <a:r>
-              <a:rPr sz="1400" b="1" i="0">
-                <a:solidFill>
-                  <a:srgbClr val="1A1A1A"/>
-                </a:solidFill>
-                <a:latin typeface="Arial"/>
-              </a:rPr>
-              <a:t>Framework + sourcing approach</a:t>
-            </a:r>
-          </a:p>
-          <a:p>
-            <a:pPr algn="ctr">
-              <a:spcAft>
-                <a:spcPts val="300"/>
-              </a:spcAft>
-            </a:pPr>
-            <a:r>
-              <a:rPr sz="1200" b="0" i="0">
-                <a:solidFill>
-                  <a:srgbClr val="595959"/>
-                </a:solidFill>
-                <a:latin typeface="Arial"/>
-              </a:rPr>
-              <a:t>end of Adapt</a:t>
-            </a:r>
-          </a:p>
-        </p:txBody>
-      </p:sp>
-      <p:sp>
-        <p:nvSpPr>
-          <p:cNvPr id="11" name="Diamond 10"/>
+          <p:cNvPr id="8" name="Rounded Rectangle 7"/>
           <p:cNvSpPr/>
           <p:nvPr/>
         </p:nvSpPr>
         <p:spPr>
           <a:xfrm>
-            <a:off x="9464040" y="2395728"/>
-            <a:ext cx="256032" cy="256032"/>
-          </a:xfrm>
-          <a:prstGeom prst="diamond">
-            <a:avLst/>
+            <a:off x="10945368" y="384048"/>
+            <a:ext cx="841248" cy="310896"/>
+          </a:xfrm>
+          <a:prstGeom prst="roundRect">
+            <a:avLst>
+              <a:gd name="adj" fmla="val 35000"/>
+            </a:avLst>
           </a:prstGeom>
           <a:solidFill>
-            <a:srgbClr val="006E96"/>
+            <a:srgbClr val="009CD6"/>
           </a:solidFill>
           <a:ln>
             <a:noFill/>
@@ -32086,14 +31924,14 @@
       </p:sp>
       <p:sp>
         <p:nvSpPr>
-          <p:cNvPr id="12" name="TextBox 11"/>
+          <p:cNvPr id="9" name="TextBox 8"/>
           <p:cNvSpPr txBox="1"/>
           <p:nvPr/>
         </p:nvSpPr>
         <p:spPr>
           <a:xfrm>
-            <a:off x="8412480" y="2880360"/>
-            <a:ext cx="2377440" cy="1188720"/>
+            <a:off x="658368" y="1508760"/>
+            <a:ext cx="2103120" cy="548640"/>
           </a:xfrm>
           <a:prstGeom prst="rect">
             <a:avLst/>
@@ -32106,49 +31944,28 @@
           </a:bodyPr>
           <a:lstStyle/>
           <a:p>
-            <a:pPr algn="ctr">
-              <a:spcAft>
-                <a:spcPts val="300"/>
-              </a:spcAft>
-            </a:pPr>
-            <a:r>
-              <a:rPr sz="1400" b="1" i="0">
-                <a:solidFill>
-                  <a:srgbClr val="1A1A1A"/>
-                </a:solidFill>
-                <a:latin typeface="Arial"/>
-              </a:rPr>
-              <a:t>Roadmap approved, budget committed</a:t>
-            </a:r>
-          </a:p>
-          <a:p>
-            <a:pPr algn="ctr">
-              <a:spcAft>
-                <a:spcPts val="300"/>
-              </a:spcAft>
-            </a:pPr>
-            <a:r>
-              <a:rPr sz="1200" b="0" i="0">
-                <a:solidFill>
-                  <a:srgbClr val="595959"/>
-                </a:solidFill>
-                <a:latin typeface="Arial"/>
-              </a:rPr>
-              <a:t>end of Plan</a:t>
-            </a:r>
-          </a:p>
-        </p:txBody>
-      </p:sp>
-      <p:sp>
-        <p:nvSpPr>
-          <p:cNvPr id="13" name="TextBox 12"/>
+            <a:r>
+              <a:rPr sz="1300" b="1" i="0">
+                <a:solidFill>
+                  <a:srgbClr val="006E96"/>
+                </a:solidFill>
+                <a:latin typeface="Arial"/>
+              </a:rPr>
+              <a:t>QUESTION</a:t>
+            </a:r>
+          </a:p>
+        </p:txBody>
+      </p:sp>
+      <p:sp>
+        <p:nvSpPr>
+          <p:cNvPr id="10" name="TextBox 9"/>
           <p:cNvSpPr txBox="1"/>
           <p:nvPr/>
         </p:nvSpPr>
         <p:spPr>
           <a:xfrm>
-            <a:off x="822960" y="4480560"/>
-            <a:ext cx="10515600" cy="1463040"/>
+            <a:off x="2834640" y="1490472"/>
+            <a:ext cx="8595360" cy="914400"/>
           </a:xfrm>
           <a:prstGeom prst="rect">
             <a:avLst/>
@@ -32161,11 +31978,6 @@
           </a:bodyPr>
           <a:lstStyle/>
           <a:p>
-            <a:pPr>
-              <a:spcAft>
-                <a:spcPts val="800"/>
-              </a:spcAft>
-            </a:pPr>
             <a:r>
               <a:rPr sz="1800" b="0" i="0">
                 <a:solidFill>
@@ -32173,30 +31985,218 @@
                 </a:solidFill>
                 <a:latin typeface="Arial"/>
               </a:rPr>
-              <a:t>Between sign-offs, the architects work.</a:t>
-            </a:r>
-          </a:p>
-          <a:p>
-            <a:pPr>
-              <a:spcAft>
-                <a:spcPts val="800"/>
-              </a:spcAft>
-            </a:pPr>
+              <a:t>How do we sustain this?</a:t>
+            </a:r>
+          </a:p>
+        </p:txBody>
+      </p:sp>
+      <p:sp>
+        <p:nvSpPr>
+          <p:cNvPr id="11" name="TextBox 10"/>
+          <p:cNvSpPr txBox="1"/>
+          <p:nvPr/>
+        </p:nvSpPr>
+        <p:spPr>
+          <a:xfrm>
+            <a:off x="658368" y="2587752"/>
+            <a:ext cx="2103120" cy="548640"/>
+          </a:xfrm>
+          <a:prstGeom prst="rect">
+            <a:avLst/>
+          </a:prstGeom>
+          <a:noFill/>
+        </p:spPr>
+        <p:txBody>
+          <a:bodyPr wrap="square">
+            <a:spAutoFit/>
+          </a:bodyPr>
+          <a:lstStyle/>
+          <a:p>
+            <a:r>
+              <a:rPr sz="1300" b="1" i="0">
+                <a:solidFill>
+                  <a:srgbClr val="006E96"/>
+                </a:solidFill>
+                <a:latin typeface="Arial"/>
+              </a:rPr>
+              <a:t>DELIVERABLE</a:t>
+            </a:r>
+          </a:p>
+        </p:txBody>
+      </p:sp>
+      <p:sp>
+        <p:nvSpPr>
+          <p:cNvPr id="12" name="TextBox 11"/>
+          <p:cNvSpPr txBox="1"/>
+          <p:nvPr/>
+        </p:nvSpPr>
+        <p:spPr>
+          <a:xfrm>
+            <a:off x="2834640" y="2569464"/>
+            <a:ext cx="8595360" cy="1417320"/>
+          </a:xfrm>
+          <a:prstGeom prst="rect">
+            <a:avLst/>
+          </a:prstGeom>
+          <a:noFill/>
+        </p:spPr>
+        <p:txBody>
+          <a:bodyPr wrap="square">
+            <a:spAutoFit/>
+          </a:bodyPr>
+          <a:lstStyle/>
+          <a:p>
+            <a:r>
+              <a:rPr sz="1800" b="1" i="0">
+                <a:solidFill>
+                  <a:srgbClr val="1A1A1A"/>
+                </a:solidFill>
+                <a:latin typeface="Arial"/>
+              </a:rPr>
+              <a:t>A living, governed EA — repository plus practice. The 2–4 permanent architects keep it alive; the EA Board reviews projects against it.</a:t>
+            </a:r>
+          </a:p>
+        </p:txBody>
+      </p:sp>
+      <p:sp>
+        <p:nvSpPr>
+          <p:cNvPr id="13" name="TextBox 12"/>
+          <p:cNvSpPr txBox="1"/>
+          <p:nvPr/>
+        </p:nvSpPr>
+        <p:spPr>
+          <a:xfrm>
+            <a:off x="658368" y="4169664"/>
+            <a:ext cx="2103120" cy="548640"/>
+          </a:xfrm>
+          <a:prstGeom prst="rect">
+            <a:avLst/>
+          </a:prstGeom>
+          <a:noFill/>
+        </p:spPr>
+        <p:txBody>
+          <a:bodyPr wrap="square">
+            <a:spAutoFit/>
+          </a:bodyPr>
+          <a:lstStyle/>
+          <a:p>
+            <a:r>
+              <a:rPr sz="1300" b="1" i="0">
+                <a:solidFill>
+                  <a:srgbClr val="006E96"/>
+                </a:solidFill>
+                <a:latin typeface="Arial"/>
+              </a:rPr>
+              <a:t>CADENCE</a:t>
+            </a:r>
+          </a:p>
+        </p:txBody>
+      </p:sp>
+      <p:sp>
+        <p:nvSpPr>
+          <p:cNvPr id="14" name="TextBox 13"/>
+          <p:cNvSpPr txBox="1"/>
+          <p:nvPr/>
+        </p:nvSpPr>
+        <p:spPr>
+          <a:xfrm>
+            <a:off x="2834640" y="4151376"/>
+            <a:ext cx="8595360" cy="1325880"/>
+          </a:xfrm>
+          <a:prstGeom prst="rect">
+            <a:avLst/>
+          </a:prstGeom>
+          <a:noFill/>
+        </p:spPr>
+        <p:txBody>
+          <a:bodyPr wrap="square">
+            <a:spAutoFit/>
+          </a:bodyPr>
+          <a:lstStyle/>
+          <a:p>
+            <a:r>
+              <a:rPr sz="1800" b="1" i="0">
+                <a:solidFill>
+                  <a:srgbClr val="1A1A1A"/>
+                </a:solidFill>
+                <a:latin typeface="Arial"/>
+              </a:rPr>
+              <a:t>Quarterly Board reviews — indefinitely. New projects reviewed against the architecture; cross-ministry decisions approved; domain boundaries enforced.</a:t>
+            </a:r>
+          </a:p>
+        </p:txBody>
+      </p:sp>
+      <p:sp>
+        <p:nvSpPr>
+          <p:cNvPr id="15" name="TextBox 14"/>
+          <p:cNvSpPr txBox="1"/>
+          <p:nvPr/>
+        </p:nvSpPr>
+        <p:spPr>
+          <a:xfrm>
+            <a:off x="658368" y="5660136"/>
+            <a:ext cx="2103120" cy="548640"/>
+          </a:xfrm>
+          <a:prstGeom prst="rect">
+            <a:avLst/>
+          </a:prstGeom>
+          <a:noFill/>
+        </p:spPr>
+        <p:txBody>
+          <a:bodyPr wrap="square">
+            <a:spAutoFit/>
+          </a:bodyPr>
+          <a:lstStyle/>
+          <a:p>
+            <a:r>
+              <a:rPr sz="1300" b="1" i="0">
+                <a:solidFill>
+                  <a:srgbClr val="006E96"/>
+                </a:solidFill>
+                <a:latin typeface="Arial"/>
+              </a:rPr>
+              <a:t>DURATION</a:t>
+            </a:r>
+          </a:p>
+        </p:txBody>
+      </p:sp>
+      <p:sp>
+        <p:nvSpPr>
+          <p:cNvPr id="16" name="TextBox 15"/>
+          <p:cNvSpPr txBox="1"/>
+          <p:nvPr/>
+        </p:nvSpPr>
+        <p:spPr>
+          <a:xfrm>
+            <a:off x="2834640" y="5641848"/>
+            <a:ext cx="8595360" cy="777240"/>
+          </a:xfrm>
+          <a:prstGeom prst="rect">
+            <a:avLst/>
+          </a:prstGeom>
+          <a:noFill/>
+        </p:spPr>
+        <p:txBody>
+          <a:bodyPr wrap="square">
+            <a:spAutoFit/>
+          </a:bodyPr>
+          <a:lstStyle/>
+          <a:p>
             <a:r>
               <a:rPr sz="1800" b="0" i="0">
                 <a:solidFill>
-                  <a:srgbClr val="595959"/>
-                </a:solidFill>
-                <a:latin typeface="Arial"/>
-              </a:rPr>
-              <a:t>The minister’s job in between is to remove obstacles — the political ones, mostly. The technical ones are why the architects were hired.</a:t>
-            </a:r>
-          </a:p>
-        </p:txBody>
-      </p:sp>
-      <p:sp>
-        <p:nvSpPr>
-          <p:cNvPr id="14" name="TextBox 13"/>
+                  <a:srgbClr val="1A1A1A"/>
+                </a:solidFill>
+                <a:latin typeface="Arial"/>
+              </a:rPr>
+              <a:t>Ongoing — your country’s permanent way of working</a:t>
+            </a:r>
+          </a:p>
+        </p:txBody>
+      </p:sp>
+      <p:sp>
+        <p:nvSpPr>
+          <p:cNvPr id="17" name="TextBox 16"/>
           <p:cNvSpPr txBox="1"/>
           <p:nvPr/>
         </p:nvSpPr>
